--- a/1-Na_Descriptors/ARIS_Experiments/new_descriptors/automat-naconductor/presentation/两代描述符筛选阶段性汇报_ppt169_20260815/exports/两代描述符筛选阶段性汇报_20260815_235732.pptx
+++ b/1-Na_Descriptors/ARIS_Experiments/new_descriptors/automat-naconductor/presentation/两代描述符筛选阶段性汇报_ppt169_20260815/exports/两代描述符筛选阶段性汇报_20260815_235732.pptx
@@ -5,29 +5,29 @@
     <p:sldMasterId id="2147483648" r:id="rId1"/>
   </p:sldMasterIdLst>
   <p:notesMasterIdLst>
-    <p:notesMasterId r:id="rId25"/>
+    <p:notesMasterId r:id="rId20"/>
   </p:notesMasterIdLst>
   <p:sldIdLst>
-    <p:sldId id="256" r:id="rId7"/>
-    <p:sldId id="257" r:id="rId8"/>
-    <p:sldId id="258" r:id="rId9"/>
-    <p:sldId id="259" r:id="rId10"/>
-    <p:sldId id="260" r:id="rId11"/>
-    <p:sldId id="261" r:id="rId12"/>
-    <p:sldId id="262" r:id="rId13"/>
-    <p:sldId id="263" r:id="rId14"/>
-    <p:sldId id="264" r:id="rId15"/>
-    <p:sldId id="265" r:id="rId16"/>
-    <p:sldId id="266" r:id="rId17"/>
-    <p:sldId id="267" r:id="rId18"/>
-    <p:sldId id="268" r:id="rId19"/>
-    <p:sldId id="269" r:id="rId20"/>
-    <p:sldId id="270" r:id="rId21"/>
-    <p:sldId id="271" r:id="rId22"/>
-    <p:sldId id="272" r:id="rId23"/>
-    <p:sldId id="273" r:id="rId24"/>
+    <p:sldId id="256" r:id="rId2"/>
+    <p:sldId id="257" r:id="rId3"/>
+    <p:sldId id="258" r:id="rId4"/>
+    <p:sldId id="259" r:id="rId5"/>
+    <p:sldId id="260" r:id="rId6"/>
+    <p:sldId id="261" r:id="rId7"/>
+    <p:sldId id="262" r:id="rId8"/>
+    <p:sldId id="263" r:id="rId9"/>
+    <p:sldId id="264" r:id="rId10"/>
+    <p:sldId id="265" r:id="rId11"/>
+    <p:sldId id="266" r:id="rId12"/>
+    <p:sldId id="267" r:id="rId13"/>
+    <p:sldId id="268" r:id="rId14"/>
+    <p:sldId id="269" r:id="rId15"/>
+    <p:sldId id="270" r:id="rId16"/>
+    <p:sldId id="271" r:id="rId17"/>
+    <p:sldId id="272" r:id="rId18"/>
+    <p:sldId id="273" r:id="rId19"/>
   </p:sldIdLst>
-  <p:sldSz cx="12192000" cy="6858000" type="screen4x3"/>
+  <p:sldSz cx="12192000" cy="6858000"/>
   <p:notesSz cx="6858000" cy="9144000"/>
   <p:defaultTextStyle>
     <a:defPPr>
@@ -124,12 +124,33 @@
       </a:defRPr>
     </a:lvl9pPr>
   </p:defaultTextStyle>
+  <p:extLst>
+    <p:ext uri="{EFAFB233-063F-42B5-8137-9DF3F51BA10A}">
+      <p15:sldGuideLst xmlns:p15="http://schemas.microsoft.com/office/powerpoint/2012/main">
+        <p15:guide id="1" orient="horz" pos="2160">
+          <p15:clr>
+            <a:srgbClr val="A4A3A4"/>
+          </p15:clr>
+        </p15:guide>
+        <p15:guide id="2" pos="2880">
+          <p15:clr>
+            <a:srgbClr val="A4A3A4"/>
+          </p15:clr>
+        </p15:guide>
+      </p15:sldGuideLst>
+    </p:ext>
+  </p:extLst>
 </p:presentation>
 </file>
 
 <file path=ppt/notesMasters/notesMaster1.xml><?xml version="1.0" encoding="utf-8"?>
 <p:notesMaster xmlns:a="http://schemas.openxmlformats.org/drawingml/2006/main" xmlns:r="http://schemas.openxmlformats.org/officeDocument/2006/relationships" xmlns:p="http://schemas.openxmlformats.org/presentationml/2006/main">
   <p:cSld>
+    <p:bg>
+      <p:bgRef idx="1001">
+        <a:schemeClr val="bg1"/>
+      </p:bgRef>
+    </p:bg>
     <p:spTree>
       <p:nvGrpSpPr>
         <p:cNvPr id="1" name=""/>
@@ -305,7 +326,7 @@
   <p:hf/>
   <p:notesStyle>
     <a:lvl1pPr marL="0" algn="l">
-      <a:defRPr sz="1200" lang="en-US"/>
+      <a:defRPr lang="en-US" sz="1200"/>
     </a:lvl1pPr>
   </p:notesStyle>
 </p:notesMaster>
@@ -1373,8 +1394,8 @@
 </p:notes>
 </file>
 
-<file path=ppt/slideLayouts/slideLayout7.xml><?xml version="1.0" encoding="utf-8"?>
-<p:sldLayout xmlns:a="http://schemas.openxmlformats.org/drawingml/2006/main" xmlns:p="http://schemas.openxmlformats.org/presentationml/2006/main" type="blank" preserve="1">
+<file path=ppt/slideLayouts/slideLayout1.xml><?xml version="1.0" encoding="utf-8"?>
+<p:sldLayout xmlns:a="http://schemas.openxmlformats.org/drawingml/2006/main" xmlns:r="http://schemas.openxmlformats.org/officeDocument/2006/relationships" xmlns:p="http://schemas.openxmlformats.org/presentationml/2006/main" type="blank" preserve="1">
   <p:cSld name="两代描述符筛选阶段性汇报 — Blank">
     <p:spTree>
       <p:nvGrpSpPr>
@@ -1407,7 +1428,7 @@
           <a:p>
             <a:fld id="{5BCAD085-E8A6-8845-BD4E-CB4CCA059FC4}" type="datetimeFigureOut">
               <a:rPr lang="en-US" smtClean="0"/>
-              <a:t>1/27/13</a:t>
+              <a:t>8/17/2026</a:t>
             </a:fld>
             <a:endParaRPr lang="en-US"/>
           </a:p>
@@ -1464,7 +1485,7 @@
 </file>
 
 <file path=ppt/slideMasters/slideMaster1.xml><?xml version="1.0" encoding="utf-8"?>
-<p:sldMaster xmlns:a="http://schemas.openxmlformats.org/drawingml/2006/main" xmlns:p="http://schemas.openxmlformats.org/presentationml/2006/main" xmlns:r="http://schemas.openxmlformats.org/officeDocument/2006/relationships">
+<p:sldMaster xmlns:a="http://schemas.openxmlformats.org/drawingml/2006/main" xmlns:r="http://schemas.openxmlformats.org/officeDocument/2006/relationships" xmlns:p="http://schemas.openxmlformats.org/presentationml/2006/main">
   <p:cSld name="两代描述符筛选阶段性汇报 — Master">
     <p:bg>
       <p:bgRef idx="1001">
@@ -1520,7 +1541,7 @@
           <a:p>
             <a:fld id="{5BCAD085-E8A6-8845-BD4E-CB4CCA059FC4}" type="datetimeFigureOut">
               <a:rPr lang="en-US" smtClean="0"/>
-              <a:t>1/27/13</a:t>
+              <a:t>8/17/2026</a:t>
             </a:fld>
             <a:endParaRPr lang="en-US"/>
           </a:p>
@@ -1608,7 +1629,7 @@
   </p:cSld>
   <p:clrMap bg1="lt1" tx1="dk1" bg2="lt2" tx2="dk2" accent1="accent1" accent2="accent2" accent3="accent3" accent4="accent4" accent5="accent5" accent6="accent6" hlink="hlink" folHlink="folHlink"/>
   <p:sldLayoutIdLst>
-    <p:sldLayoutId id="2147483655" r:id="rId7"/>
+    <p:sldLayoutId id="2147483655" r:id="rId1"/>
   </p:sldLayoutIdLst>
   <p:txStyles>
     <p:titleStyle>
@@ -2014,7 +2035,7 @@
                   <a:ea typeface="+mj-ea"/>
                   <a:cs typeface="+mj-cs"/>
                 </a:rPr>
-                <a:t xml:space="preserve">高分 </a:t>
+                <a:t>高分 </a:t>
               </a:r>
               <a:r>
                 <a:rPr lang="en-US" sz="5850" b="1" dirty="0">
@@ -2036,7 +2057,7 @@
                   <a:ea typeface="+mj-ea"/>
                   <a:cs typeface="+mj-cs"/>
                 </a:rPr>
-                <a:t xml:space="preserve"> 规律</a:t>
+                <a:t> 规律</a:t>
               </a:r>
             </a:p>
           </p:txBody>
@@ -2829,9 +2850,18 @@
   <p:clrMapOvr>
     <a:masterClrMapping/>
   </p:clrMapOvr>
-  <p:transition xmlns:p14="http://schemas.microsoft.com/office/powerpoint/2010/main" p14:dur="400">
-    <p:fade/>
-  </p:transition>
+  <mc:AlternateContent xmlns:mc="http://schemas.openxmlformats.org/markup-compatibility/2006">
+    <mc:Choice xmlns:p14="http://schemas.microsoft.com/office/powerpoint/2010/main" Requires="p14">
+      <p:transition p14:dur="400">
+        <p:fade/>
+      </p:transition>
+    </mc:Choice>
+    <mc:Fallback>
+      <p:transition>
+        <p:fade/>
+      </p:transition>
+    </mc:Fallback>
+  </mc:AlternateContent>
 </p:sld>
 </file>
 
@@ -4450,9 +4480,18 @@
   <p:clrMapOvr>
     <a:masterClrMapping/>
   </p:clrMapOvr>
-  <p:transition xmlns:p14="http://schemas.microsoft.com/office/powerpoint/2010/main" p14:dur="400">
-    <p:fade/>
-  </p:transition>
+  <mc:AlternateContent xmlns:mc="http://schemas.openxmlformats.org/markup-compatibility/2006">
+    <mc:Choice xmlns:p14="http://schemas.microsoft.com/office/powerpoint/2010/main" Requires="p14">
+      <p:transition p14:dur="400">
+        <p:fade/>
+      </p:transition>
+    </mc:Choice>
+    <mc:Fallback>
+      <p:transition>
+        <p:fade/>
+      </p:transition>
+    </mc:Fallback>
+  </mc:AlternateContent>
 </p:sld>
 </file>
 
@@ -5578,9 +5617,18 @@
   <p:clrMapOvr>
     <a:masterClrMapping/>
   </p:clrMapOvr>
-  <p:transition xmlns:p14="http://schemas.microsoft.com/office/powerpoint/2010/main" p14:dur="400">
-    <p:fade/>
-  </p:transition>
+  <mc:AlternateContent xmlns:mc="http://schemas.openxmlformats.org/markup-compatibility/2006">
+    <mc:Choice xmlns:p14="http://schemas.microsoft.com/office/powerpoint/2010/main" Requires="p14">
+      <p:transition p14:dur="400">
+        <p:fade/>
+      </p:transition>
+    </mc:Choice>
+    <mc:Fallback>
+      <p:transition>
+        <p:fade/>
+      </p:transition>
+    </mc:Fallback>
+  </mc:AlternateContent>
 </p:sld>
 </file>
 
@@ -7284,9 +7332,18 @@
   <p:clrMapOvr>
     <a:masterClrMapping/>
   </p:clrMapOvr>
-  <p:transition xmlns:p14="http://schemas.microsoft.com/office/powerpoint/2010/main" p14:dur="400">
-    <p:fade/>
-  </p:transition>
+  <mc:AlternateContent xmlns:mc="http://schemas.openxmlformats.org/markup-compatibility/2006">
+    <mc:Choice xmlns:p14="http://schemas.microsoft.com/office/powerpoint/2010/main" Requires="p14">
+      <p:transition p14:dur="400">
+        <p:fade/>
+      </p:transition>
+    </mc:Choice>
+    <mc:Fallback>
+      <p:transition>
+        <p:fade/>
+      </p:transition>
+    </mc:Fallback>
+  </mc:AlternateContent>
 </p:sld>
 </file>
 
@@ -8376,9 +8433,18 @@
   <p:clrMapOvr>
     <a:masterClrMapping/>
   </p:clrMapOvr>
-  <p:transition xmlns:p14="http://schemas.microsoft.com/office/powerpoint/2010/main" p14:dur="400">
-    <p:fade/>
-  </p:transition>
+  <mc:AlternateContent xmlns:mc="http://schemas.openxmlformats.org/markup-compatibility/2006">
+    <mc:Choice xmlns:p14="http://schemas.microsoft.com/office/powerpoint/2010/main" Requires="p14">
+      <p:transition p14:dur="400">
+        <p:fade/>
+      </p:transition>
+    </mc:Choice>
+    <mc:Fallback>
+      <p:transition>
+        <p:fade/>
+      </p:transition>
+    </mc:Fallback>
+  </mc:AlternateContent>
 </p:sld>
 </file>
 
@@ -9674,7 +9740,7 @@
                   <a:ea typeface="+mn-ea"/>
                   <a:cs typeface="+mn-cs"/>
                 </a:rPr>
-                <a:t xml:space="preserve"> </a:t>
+                <a:t> </a:t>
               </a:r>
               <a:r>
                 <a:rPr lang="zh-CN" sz="1200" dirty="0">
@@ -9696,7 +9762,7 @@
                   <a:ea typeface="+mn-ea"/>
                   <a:cs typeface="+mn-cs"/>
                 </a:rPr>
-                <a:t xml:space="preserve"> </a:t>
+                <a:t> </a:t>
               </a:r>
               <a:r>
                 <a:rPr lang="zh-CN" sz="1200" dirty="0">
@@ -9932,9 +9998,18 @@
   <p:clrMapOvr>
     <a:masterClrMapping/>
   </p:clrMapOvr>
-  <p:transition xmlns:p14="http://schemas.microsoft.com/office/powerpoint/2010/main" p14:dur="400">
-    <p:fade/>
-  </p:transition>
+  <mc:AlternateContent xmlns:mc="http://schemas.openxmlformats.org/markup-compatibility/2006">
+    <mc:Choice xmlns:p14="http://schemas.microsoft.com/office/powerpoint/2010/main" Requires="p14">
+      <p:transition p14:dur="400">
+        <p:fade/>
+      </p:transition>
+    </mc:Choice>
+    <mc:Fallback>
+      <p:transition>
+        <p:fade/>
+      </p:transition>
+    </mc:Fallback>
+  </mc:AlternateContent>
 </p:sld>
 </file>
 
@@ -10984,9 +11059,18 @@
   <p:clrMapOvr>
     <a:masterClrMapping/>
   </p:clrMapOvr>
-  <p:transition xmlns:p14="http://schemas.microsoft.com/office/powerpoint/2010/main" p14:dur="400">
-    <p:fade/>
-  </p:transition>
+  <mc:AlternateContent xmlns:mc="http://schemas.openxmlformats.org/markup-compatibility/2006">
+    <mc:Choice xmlns:p14="http://schemas.microsoft.com/office/powerpoint/2010/main" Requires="p14">
+      <p:transition p14:dur="400">
+        <p:fade/>
+      </p:transition>
+    </mc:Choice>
+    <mc:Fallback>
+      <p:transition>
+        <p:fade/>
+      </p:transition>
+    </mc:Fallback>
+  </mc:AlternateContent>
 </p:sld>
 </file>
 
@@ -13526,9 +13610,18 @@
   <p:clrMapOvr>
     <a:masterClrMapping/>
   </p:clrMapOvr>
-  <p:transition xmlns:p14="http://schemas.microsoft.com/office/powerpoint/2010/main" p14:dur="400">
-    <p:fade/>
-  </p:transition>
+  <mc:AlternateContent xmlns:mc="http://schemas.openxmlformats.org/markup-compatibility/2006">
+    <mc:Choice xmlns:p14="http://schemas.microsoft.com/office/powerpoint/2010/main" Requires="p14">
+      <p:transition p14:dur="400">
+        <p:fade/>
+      </p:transition>
+    </mc:Choice>
+    <mc:Fallback>
+      <p:transition>
+        <p:fade/>
+      </p:transition>
+    </mc:Fallback>
+  </mc:AlternateContent>
 </p:sld>
 </file>
 
@@ -14796,9 +14889,18 @@
   <p:clrMapOvr>
     <a:masterClrMapping/>
   </p:clrMapOvr>
-  <p:transition xmlns:p14="http://schemas.microsoft.com/office/powerpoint/2010/main" p14:dur="400">
-    <p:fade/>
-  </p:transition>
+  <mc:AlternateContent xmlns:mc="http://schemas.openxmlformats.org/markup-compatibility/2006">
+    <mc:Choice xmlns:p14="http://schemas.microsoft.com/office/powerpoint/2010/main" Requires="p14">
+      <p:transition p14:dur="400">
+        <p:fade/>
+      </p:transition>
+    </mc:Choice>
+    <mc:Fallback>
+      <p:transition>
+        <p:fade/>
+      </p:transition>
+    </mc:Fallback>
+  </mc:AlternateContent>
 </p:sld>
 </file>
 
@@ -16343,7 +16445,7 @@
                   <a:ea typeface="+mn-ea"/>
                   <a:cs typeface="+mn-cs"/>
                 </a:rPr>
-                <a:t xml:space="preserve"> </a:t>
+                <a:t> </a:t>
               </a:r>
               <a:r>
                 <a:rPr lang="zh-CN" sz="1200" dirty="0">
@@ -16577,9 +16679,18 @@
   <p:clrMapOvr>
     <a:masterClrMapping/>
   </p:clrMapOvr>
-  <p:transition xmlns:p14="http://schemas.microsoft.com/office/powerpoint/2010/main" p14:dur="400">
-    <p:fade/>
-  </p:transition>
+  <mc:AlternateContent xmlns:mc="http://schemas.openxmlformats.org/markup-compatibility/2006">
+    <mc:Choice xmlns:p14="http://schemas.microsoft.com/office/powerpoint/2010/main" Requires="p14">
+      <p:transition p14:dur="400">
+        <p:fade/>
+      </p:transition>
+    </mc:Choice>
+    <mc:Fallback>
+      <p:transition>
+        <p:fade/>
+      </p:transition>
+    </mc:Fallback>
+  </mc:AlternateContent>
 </p:sld>
 </file>
 
@@ -17994,9 +18105,18 @@
   <p:clrMapOvr>
     <a:masterClrMapping/>
   </p:clrMapOvr>
-  <p:transition xmlns:p14="http://schemas.microsoft.com/office/powerpoint/2010/main" p14:dur="400">
-    <p:fade/>
-  </p:transition>
+  <mc:AlternateContent xmlns:mc="http://schemas.openxmlformats.org/markup-compatibility/2006">
+    <mc:Choice xmlns:p14="http://schemas.microsoft.com/office/powerpoint/2010/main" Requires="p14">
+      <p:transition p14:dur="400">
+        <p:fade/>
+      </p:transition>
+    </mc:Choice>
+    <mc:Fallback>
+      <p:transition>
+        <p:fade/>
+      </p:transition>
+    </mc:Fallback>
+  </mc:AlternateContent>
 </p:sld>
 </file>
 
@@ -19745,9 +19865,18 @@
   <p:clrMapOvr>
     <a:masterClrMapping/>
   </p:clrMapOvr>
-  <p:transition xmlns:p14="http://schemas.microsoft.com/office/powerpoint/2010/main" p14:dur="400">
-    <p:fade/>
-  </p:transition>
+  <mc:AlternateContent xmlns:mc="http://schemas.openxmlformats.org/markup-compatibility/2006">
+    <mc:Choice xmlns:p14="http://schemas.microsoft.com/office/powerpoint/2010/main" Requires="p14">
+      <p:transition p14:dur="400">
+        <p:fade/>
+      </p:transition>
+    </mc:Choice>
+    <mc:Fallback>
+      <p:transition>
+        <p:fade/>
+      </p:transition>
+    </mc:Fallback>
+  </mc:AlternateContent>
 </p:sld>
 </file>
 
@@ -21348,9 +21477,18 @@
   <p:clrMapOvr>
     <a:masterClrMapping/>
   </p:clrMapOvr>
-  <p:transition xmlns:p14="http://schemas.microsoft.com/office/powerpoint/2010/main" p14:dur="400">
-    <p:fade/>
-  </p:transition>
+  <mc:AlternateContent xmlns:mc="http://schemas.openxmlformats.org/markup-compatibility/2006">
+    <mc:Choice xmlns:p14="http://schemas.microsoft.com/office/powerpoint/2010/main" Requires="p14">
+      <p:transition p14:dur="400">
+        <p:fade/>
+      </p:transition>
+    </mc:Choice>
+    <mc:Fallback>
+      <p:transition>
+        <p:fade/>
+      </p:transition>
+    </mc:Fallback>
+  </mc:AlternateContent>
 </p:sld>
 </file>
 
@@ -22323,9 +22461,18 @@
   <p:clrMapOvr>
     <a:masterClrMapping/>
   </p:clrMapOvr>
-  <p:transition xmlns:p14="http://schemas.microsoft.com/office/powerpoint/2010/main" p14:dur="400">
-    <p:fade/>
-  </p:transition>
+  <mc:AlternateContent xmlns:mc="http://schemas.openxmlformats.org/markup-compatibility/2006">
+    <mc:Choice xmlns:p14="http://schemas.microsoft.com/office/powerpoint/2010/main" Requires="p14">
+      <p:transition p14:dur="400">
+        <p:fade/>
+      </p:transition>
+    </mc:Choice>
+    <mc:Fallback>
+      <p:transition>
+        <p:fade/>
+      </p:transition>
+    </mc:Fallback>
+  </mc:AlternateContent>
 </p:sld>
 </file>
 
@@ -23649,9 +23796,18 @@
   <p:clrMapOvr>
     <a:masterClrMapping/>
   </p:clrMapOvr>
-  <p:transition xmlns:p14="http://schemas.microsoft.com/office/powerpoint/2010/main" p14:dur="400">
-    <p:fade/>
-  </p:transition>
+  <mc:AlternateContent xmlns:mc="http://schemas.openxmlformats.org/markup-compatibility/2006">
+    <mc:Choice xmlns:p14="http://schemas.microsoft.com/office/powerpoint/2010/main" Requires="p14">
+      <p:transition p14:dur="400">
+        <p:fade/>
+      </p:transition>
+    </mc:Choice>
+    <mc:Fallback>
+      <p:transition>
+        <p:fade/>
+      </p:transition>
+    </mc:Fallback>
+  </mc:AlternateContent>
 </p:sld>
 </file>
 
@@ -25763,9 +25919,18 @@
   <p:clrMapOvr>
     <a:masterClrMapping/>
   </p:clrMapOvr>
-  <p:transition xmlns:p14="http://schemas.microsoft.com/office/powerpoint/2010/main" p14:dur="400">
-    <p:fade/>
-  </p:transition>
+  <mc:AlternateContent xmlns:mc="http://schemas.openxmlformats.org/markup-compatibility/2006">
+    <mc:Choice xmlns:p14="http://schemas.microsoft.com/office/powerpoint/2010/main" Requires="p14">
+      <p:transition p14:dur="400">
+        <p:fade/>
+      </p:transition>
+    </mc:Choice>
+    <mc:Fallback>
+      <p:transition>
+        <p:fade/>
+      </p:transition>
+    </mc:Fallback>
+  </mc:AlternateContent>
 </p:sld>
 </file>
 
@@ -27374,9 +27539,18 @@
   <p:clrMapOvr>
     <a:masterClrMapping/>
   </p:clrMapOvr>
-  <p:transition xmlns:p14="http://schemas.microsoft.com/office/powerpoint/2010/main" p14:dur="400">
-    <p:fade/>
-  </p:transition>
+  <mc:AlternateContent xmlns:mc="http://schemas.openxmlformats.org/markup-compatibility/2006">
+    <mc:Choice xmlns:p14="http://schemas.microsoft.com/office/powerpoint/2010/main" Requires="p14">
+      <p:transition p14:dur="400">
+        <p:fade/>
+      </p:transition>
+    </mc:Choice>
+    <mc:Fallback>
+      <p:transition>
+        <p:fade/>
+      </p:transition>
+    </mc:Fallback>
+  </mc:AlternateContent>
 </p:sld>
 </file>
 
@@ -28719,9 +28893,18 @@
   <p:clrMapOvr>
     <a:masterClrMapping/>
   </p:clrMapOvr>
-  <p:transition xmlns:p14="http://schemas.microsoft.com/office/powerpoint/2010/main" p14:dur="400">
-    <p:fade/>
-  </p:transition>
+  <mc:AlternateContent xmlns:mc="http://schemas.openxmlformats.org/markup-compatibility/2006">
+    <mc:Choice xmlns:p14="http://schemas.microsoft.com/office/powerpoint/2010/main" Requires="p14">
+      <p:transition p14:dur="400">
+        <p:fade/>
+      </p:transition>
+    </mc:Choice>
+    <mc:Fallback>
+      <p:transition>
+        <p:fade/>
+      </p:transition>
+    </mc:Fallback>
+  </mc:AlternateContent>
 </p:sld>
 </file>
 
